--- a/Notes/1_Intro_Classical_Waves.pptx
+++ b/Notes/1_Intro_Classical_Waves.pptx
@@ -232,7 +232,7 @@
           <a:p>
             <a:fld id="{47B5508F-B9DA-3A4B-92BF-6A4138802024}" type="datetimeFigureOut">
               <a:rPr lang="en-US" smtClean="0"/>
-              <a:t>1/29/25</a:t>
+              <a:t>9/8/26</a:t>
             </a:fld>
             <a:endParaRPr lang="en-US"/>
           </a:p>
@@ -766,7 +766,7 @@
             <a:fld id="{B2F2B4BC-311C-574E-AB1F-5BCC7E00BDAB}" type="datetimeFigureOut">
               <a:rPr lang="en-US" smtClean="0"/>
               <a:pPr/>
-              <a:t>1/29/25</a:t>
+              <a:t>9/8/26</a:t>
             </a:fld>
             <a:endParaRPr lang="en-US"/>
           </a:p>
@@ -931,7 +931,7 @@
             <a:fld id="{B2F2B4BC-311C-574E-AB1F-5BCC7E00BDAB}" type="datetimeFigureOut">
               <a:rPr lang="en-US" smtClean="0"/>
               <a:pPr/>
-              <a:t>1/29/25</a:t>
+              <a:t>9/8/26</a:t>
             </a:fld>
             <a:endParaRPr lang="en-US"/>
           </a:p>
@@ -1106,7 +1106,7 @@
             <a:fld id="{B2F2B4BC-311C-574E-AB1F-5BCC7E00BDAB}" type="datetimeFigureOut">
               <a:rPr lang="en-US" smtClean="0"/>
               <a:pPr/>
-              <a:t>1/29/25</a:t>
+              <a:t>9/8/26</a:t>
             </a:fld>
             <a:endParaRPr lang="en-US"/>
           </a:p>
@@ -1271,7 +1271,7 @@
             <a:fld id="{B2F2B4BC-311C-574E-AB1F-5BCC7E00BDAB}" type="datetimeFigureOut">
               <a:rPr lang="en-US" smtClean="0"/>
               <a:pPr/>
-              <a:t>1/29/25</a:t>
+              <a:t>9/8/26</a:t>
             </a:fld>
             <a:endParaRPr lang="en-US"/>
           </a:p>
@@ -1513,7 +1513,7 @@
             <a:fld id="{B2F2B4BC-311C-574E-AB1F-5BCC7E00BDAB}" type="datetimeFigureOut">
               <a:rPr lang="en-US" smtClean="0"/>
               <a:pPr/>
-              <a:t>1/29/25</a:t>
+              <a:t>9/8/26</a:t>
             </a:fld>
             <a:endParaRPr lang="en-US"/>
           </a:p>
@@ -1795,7 +1795,7 @@
             <a:fld id="{B2F2B4BC-311C-574E-AB1F-5BCC7E00BDAB}" type="datetimeFigureOut">
               <a:rPr lang="en-US" smtClean="0"/>
               <a:pPr/>
-              <a:t>1/29/25</a:t>
+              <a:t>9/8/26</a:t>
             </a:fld>
             <a:endParaRPr lang="en-US"/>
           </a:p>
@@ -2211,7 +2211,7 @@
             <a:fld id="{B2F2B4BC-311C-574E-AB1F-5BCC7E00BDAB}" type="datetimeFigureOut">
               <a:rPr lang="en-US" smtClean="0"/>
               <a:pPr/>
-              <a:t>1/29/25</a:t>
+              <a:t>9/8/26</a:t>
             </a:fld>
             <a:endParaRPr lang="en-US"/>
           </a:p>
@@ -2325,7 +2325,7 @@
             <a:fld id="{B2F2B4BC-311C-574E-AB1F-5BCC7E00BDAB}" type="datetimeFigureOut">
               <a:rPr lang="en-US" smtClean="0"/>
               <a:pPr/>
-              <a:t>1/29/25</a:t>
+              <a:t>9/8/26</a:t>
             </a:fld>
             <a:endParaRPr lang="en-US"/>
           </a:p>
@@ -2417,7 +2417,7 @@
             <a:fld id="{B2F2B4BC-311C-574E-AB1F-5BCC7E00BDAB}" type="datetimeFigureOut">
               <a:rPr lang="en-US" smtClean="0"/>
               <a:pPr/>
-              <a:t>1/29/25</a:t>
+              <a:t>9/8/26</a:t>
             </a:fld>
             <a:endParaRPr lang="en-US"/>
           </a:p>
@@ -2689,7 +2689,7 @@
             <a:fld id="{B2F2B4BC-311C-574E-AB1F-5BCC7E00BDAB}" type="datetimeFigureOut">
               <a:rPr lang="en-US" smtClean="0"/>
               <a:pPr/>
-              <a:t>1/29/25</a:t>
+              <a:t>9/8/26</a:t>
             </a:fld>
             <a:endParaRPr lang="en-US"/>
           </a:p>
@@ -2938,7 +2938,7 @@
             <a:fld id="{B2F2B4BC-311C-574E-AB1F-5BCC7E00BDAB}" type="datetimeFigureOut">
               <a:rPr lang="en-US" smtClean="0"/>
               <a:pPr/>
-              <a:t>1/29/25</a:t>
+              <a:t>9/8/26</a:t>
             </a:fld>
             <a:endParaRPr lang="en-US"/>
           </a:p>
@@ -3146,7 +3146,7 @@
             <a:fld id="{B2F2B4BC-311C-574E-AB1F-5BCC7E00BDAB}" type="datetimeFigureOut">
               <a:rPr lang="en-US" smtClean="0"/>
               <a:pPr/>
-              <a:t>1/29/25</a:t>
+              <a:t>9/8/26</a:t>
             </a:fld>
             <a:endParaRPr lang="en-US"/>
           </a:p>
@@ -3702,7 +3702,7 @@
                       <a:noFill/>
                       <a:extLst>
                         <a:ext uri="{909E8E84-426E-40dd-AFC4-6F175D3DCCD1}">
-                          <a14:hiddenFill xmlns="" xmlns:a14="http://schemas.microsoft.com/office/drawing/2010/main">
+                          <a14:hiddenFill xmlns:a14="http://schemas.microsoft.com/office/drawing/2010/main" xmlns="">
                             <a:blipFill dpi="0" rotWithShape="0">
                               <a:blip/>
                               <a:srcRect/>
@@ -3782,7 +3782,7 @@
                       <a:noFill/>
                       <a:extLst>
                         <a:ext uri="{909E8E84-426E-40dd-AFC4-6F175D3DCCD1}">
-                          <a14:hiddenFill xmlns="" xmlns:a14="http://schemas.microsoft.com/office/drawing/2010/main">
+                          <a14:hiddenFill xmlns:a14="http://schemas.microsoft.com/office/drawing/2010/main" xmlns="">
                             <a:blipFill dpi="0" rotWithShape="0">
                               <a:blip/>
                               <a:srcRect/>
@@ -4745,6 +4745,7 @@
             <a:headEnd/>
             <a:tailEnd/>
           </a:ln>
+          <a:effectLst/>
         </p:spPr>
       </p:pic>
       <p:sp>
@@ -4770,6 +4771,7 @@
             <a:headEnd/>
             <a:tailEnd/>
           </a:ln>
+          <a:effectLst/>
         </p:spPr>
         <p:txBody>
           <a:bodyPr lIns="0" tIns="0" rIns="0" bIns="0" anchor="ctr"/>
@@ -4832,6 +4834,7 @@
             <a:headEnd/>
             <a:tailEnd/>
           </a:ln>
+          <a:effectLst/>
         </p:spPr>
         <p:txBody>
           <a:bodyPr lIns="0" tIns="0" rIns="0" bIns="0"/>
@@ -4932,6 +4935,7 @@
           <a:prstGeom prst="rect">
             <a:avLst/>
           </a:prstGeom>
+          <a:effectLst/>
         </p:spPr>
       </p:pic>
       <p:pic>
@@ -4956,6 +4960,7 @@
           <a:prstGeom prst="rect">
             <a:avLst/>
           </a:prstGeom>
+          <a:effectLst/>
         </p:spPr>
       </p:pic>
       <p:sp>
@@ -4972,6 +4977,7 @@
           <a:prstGeom prst="rect">
             <a:avLst/>
           </a:prstGeom>
+          <a:effectLst/>
         </p:spPr>
         <p:txBody>
           <a:bodyPr wrap="none">
@@ -5006,6 +5012,7 @@
           <a:prstGeom prst="rect">
             <a:avLst/>
           </a:prstGeom>
+          <a:effectLst/>
         </p:spPr>
         <p:txBody>
           <a:bodyPr wrap="none">
@@ -5043,6 +5050,7 @@
           <a:prstGeom prst="rect">
             <a:avLst/>
           </a:prstGeom>
+          <a:effectLst/>
         </p:spPr>
         <p:txBody>
           <a:bodyPr wrap="none">
@@ -5082,6 +5090,7 @@
           <a:ln>
             <a:tailEnd type="arrow"/>
           </a:ln>
+          <a:effectLst/>
         </p:spPr>
         <p:style>
           <a:lnRef idx="2">
@@ -5117,6 +5126,7 @@
           <a:ln>
             <a:tailEnd type="arrow"/>
           </a:ln>
+          <a:effectLst/>
         </p:spPr>
         <p:style>
           <a:lnRef idx="2">
@@ -5150,6 +5160,7 @@
           <a:ln>
             <a:tailEnd type="arrow"/>
           </a:ln>
+          <a:effectLst/>
         </p:spPr>
         <p:style>
           <a:lnRef idx="2">
@@ -5183,6 +5194,7 @@
           <a:ln>
             <a:tailEnd type="arrow"/>
           </a:ln>
+          <a:effectLst/>
         </p:spPr>
         <p:style>
           <a:lnRef idx="2">
@@ -5216,6 +5228,7 @@
           <a:ln>
             <a:tailEnd type="arrow"/>
           </a:ln>
+          <a:effectLst/>
         </p:spPr>
         <p:style>
           <a:lnRef idx="2">
@@ -8677,6 +8690,7 @@
             <a:headEnd/>
             <a:tailEnd/>
           </a:ln>
+          <a:effectLst/>
         </p:spPr>
       </p:pic>
       <p:sp>
@@ -8764,6 +8778,7 @@
             <a:headEnd/>
             <a:tailEnd/>
           </a:ln>
+          <a:effectLst/>
         </p:spPr>
         <p:txBody>
           <a:bodyPr lIns="0" tIns="0" rIns="0" bIns="0"/>
@@ -8870,6 +8885,7 @@
           <a:prstGeom prst="rect">
             <a:avLst/>
           </a:prstGeom>
+          <a:effectLst/>
         </p:spPr>
         <p:txBody>
           <a:bodyPr wrap="none">
@@ -8912,6 +8928,7 @@
           <a:prstGeom prst="rect">
             <a:avLst/>
           </a:prstGeom>
+          <a:effectLst/>
         </p:spPr>
       </p:pic>
       <p:sp>
@@ -8928,6 +8945,7 @@
           <a:prstGeom prst="rect">
             <a:avLst/>
           </a:prstGeom>
+          <a:effectLst/>
         </p:spPr>
         <p:txBody>
           <a:bodyPr wrap="none">
@@ -8962,6 +8980,7 @@
           <a:prstGeom prst="rect">
             <a:avLst/>
           </a:prstGeom>
+          <a:effectLst/>
         </p:spPr>
         <p:txBody>
           <a:bodyPr wrap="none">
@@ -9001,6 +9020,7 @@
           <a:ln>
             <a:tailEnd type="arrow"/>
           </a:ln>
+          <a:effectLst/>
         </p:spPr>
         <p:style>
           <a:lnRef idx="2">
@@ -9036,6 +9056,7 @@
           <a:ln>
             <a:tailEnd type="arrow"/>
           </a:ln>
+          <a:effectLst/>
         </p:spPr>
         <p:style>
           <a:lnRef idx="2">
@@ -9071,6 +9092,7 @@
           <a:ln>
             <a:tailEnd type="arrow"/>
           </a:ln>
+          <a:effectLst/>
         </p:spPr>
         <p:style>
           <a:lnRef idx="2">
@@ -9104,6 +9126,7 @@
           <a:ln>
             <a:tailEnd type="arrow"/>
           </a:ln>
+          <a:effectLst/>
         </p:spPr>
         <p:style>
           <a:lnRef idx="2">
@@ -9148,6 +9171,7 @@
           <a:prstGeom prst="rect">
             <a:avLst/>
           </a:prstGeom>
+          <a:effectLst/>
         </p:spPr>
       </p:pic>
     </p:spTree>
@@ -9852,7 +9876,7 @@
         </p:blipFill>
         <p:spPr bwMode="auto">
           <a:xfrm>
-            <a:off x="484188" y="76200"/>
+            <a:off x="529962" y="85725"/>
             <a:ext cx="8202612" cy="239712"/>
           </a:xfrm>
           <a:prstGeom prst="rect">
@@ -10717,6 +10741,7 @@
             <a:headEnd/>
             <a:tailEnd/>
           </a:ln>
+          <a:effectLst/>
         </p:spPr>
       </p:pic>
       <p:sp>
@@ -10927,6 +10952,7 @@
           <a:prstGeom prst="rect">
             <a:avLst/>
           </a:prstGeom>
+          <a:effectLst/>
         </p:spPr>
       </p:pic>
       <p:pic>
@@ -10951,6 +10977,7 @@
           <a:prstGeom prst="rect">
             <a:avLst/>
           </a:prstGeom>
+          <a:effectLst/>
         </p:spPr>
       </p:pic>
       <p:pic>
@@ -10975,6 +11002,7 @@
           <a:prstGeom prst="rect">
             <a:avLst/>
           </a:prstGeom>
+          <a:effectLst/>
         </p:spPr>
       </p:pic>
       <p:sp>
@@ -10991,6 +11019,7 @@
           <a:prstGeom prst="rightBrace">
             <a:avLst/>
           </a:prstGeom>
+          <a:effectLst/>
         </p:spPr>
         <p:style>
           <a:lnRef idx="2">
@@ -11029,6 +11058,7 @@
           <a:prstGeom prst="rightBrace">
             <a:avLst/>
           </a:prstGeom>
+          <a:effectLst/>
         </p:spPr>
         <p:style>
           <a:lnRef idx="2">
@@ -11072,6 +11102,7 @@
           <a:ln>
             <a:tailEnd type="arrow"/>
           </a:ln>
+          <a:effectLst/>
         </p:spPr>
         <p:style>
           <a:lnRef idx="2">
@@ -11105,6 +11136,7 @@
           <a:ln>
             <a:tailEnd type="arrow"/>
           </a:ln>
+          <a:effectLst/>
         </p:spPr>
         <p:style>
           <a:lnRef idx="2">
@@ -11604,6 +11636,7 @@
             <a:headEnd/>
             <a:tailEnd/>
           </a:ln>
+          <a:effectLst/>
         </p:spPr>
       </p:pic>
       <p:sp>
@@ -11703,6 +11736,7 @@
             <a:headEnd/>
             <a:tailEnd/>
           </a:ln>
+          <a:effectLst/>
         </p:spPr>
         <p:txBody>
           <a:bodyPr lIns="0" tIns="0" rIns="0" bIns="0"/>
@@ -11824,6 +11858,7 @@
           <a:prstGeom prst="rect">
             <a:avLst/>
           </a:prstGeom>
+          <a:effectLst/>
         </p:spPr>
         <p:txBody>
           <a:bodyPr wrap="none">
@@ -11872,6 +11907,7 @@
           <a:prstGeom prst="rect">
             <a:avLst/>
           </a:prstGeom>
+          <a:effectLst/>
         </p:spPr>
       </p:pic>
       <p:pic>
@@ -11902,6 +11938,7 @@
           <a:prstGeom prst="rect">
             <a:avLst/>
           </a:prstGeom>
+          <a:effectLst/>
         </p:spPr>
       </p:pic>
       <p:pic>
@@ -11931,6 +11968,7 @@
           <a:prstGeom prst="rect">
             <a:avLst/>
           </a:prstGeom>
+          <a:effectLst/>
         </p:spPr>
       </p:pic>
       <p:cxnSp>
@@ -11958,6 +11996,7 @@
           <a:ln>
             <a:tailEnd type="arrow"/>
           </a:ln>
+          <a:effectLst/>
         </p:spPr>
         <p:style>
           <a:lnRef idx="2">
@@ -11999,6 +12038,7 @@
           <a:ln>
             <a:tailEnd type="arrow"/>
           </a:ln>
+          <a:effectLst/>
         </p:spPr>
         <p:style>
           <a:lnRef idx="2">
@@ -12035,6 +12075,7 @@
           <a:prstGeom prst="rect">
             <a:avLst/>
           </a:prstGeom>
+          <a:effectLst/>
         </p:spPr>
         <p:txBody>
           <a:bodyPr wrap="none">
@@ -12083,6 +12124,7 @@
           <a:prstGeom prst="rect">
             <a:avLst/>
           </a:prstGeom>
+          <a:effectLst/>
         </p:spPr>
       </p:pic>
     </p:spTree>
@@ -12750,6 +12792,7 @@
             <a:headEnd/>
             <a:tailEnd/>
           </a:ln>
+          <a:effectLst/>
         </p:spPr>
       </p:pic>
       <p:sp>
@@ -12849,6 +12892,7 @@
             <a:headEnd/>
             <a:tailEnd/>
           </a:ln>
+          <a:effectLst/>
         </p:spPr>
         <p:txBody>
           <a:bodyPr lIns="0" tIns="0" rIns="0" bIns="0"/>
@@ -12959,6 +13003,7 @@
           <a:prstGeom prst="rect">
             <a:avLst/>
           </a:prstGeom>
+          <a:effectLst/>
         </p:spPr>
         <p:txBody>
           <a:bodyPr wrap="none">
@@ -13007,6 +13052,7 @@
           <a:prstGeom prst="rect">
             <a:avLst/>
           </a:prstGeom>
+          <a:effectLst/>
         </p:spPr>
       </p:pic>
       <p:cxnSp>
@@ -13032,6 +13078,7 @@
           <a:ln>
             <a:tailEnd type="arrow"/>
           </a:ln>
+          <a:effectLst/>
         </p:spPr>
         <p:style>
           <a:lnRef idx="2">
@@ -13073,6 +13120,7 @@
           <a:ln>
             <a:tailEnd type="arrow"/>
           </a:ln>
+          <a:effectLst/>
         </p:spPr>
         <p:style>
           <a:lnRef idx="2">
@@ -13176,6 +13224,7 @@
             <a:avLst/>
           </a:prstGeom>
           <a:noFill/>
+          <a:effectLst/>
         </p:spPr>
         <p:txBody>
           <a:bodyPr wrap="none" rtlCol="0">
@@ -13234,6 +13283,7 @@
               <a:srgbClr val="008000"/>
             </a:solidFill>
           </a:ln>
+          <a:effectLst/>
         </p:spPr>
         <p:style>
           <a:lnRef idx="1">
@@ -13281,6 +13331,7 @@
           <a:ln>
             <a:tailEnd type="arrow"/>
           </a:ln>
+          <a:effectLst/>
         </p:spPr>
         <p:style>
           <a:lnRef idx="2">
@@ -13325,6 +13376,7 @@
           <a:prstGeom prst="rect">
             <a:avLst/>
           </a:prstGeom>
+          <a:effectLst/>
         </p:spPr>
       </p:pic>
       <p:pic>
@@ -13355,6 +13407,7 @@
           <a:prstGeom prst="rect">
             <a:avLst/>
           </a:prstGeom>
+          <a:effectLst/>
         </p:spPr>
       </p:pic>
     </p:spTree>
@@ -16440,7 +16493,7 @@
         <p:spPr>
           <a:xfrm>
             <a:off x="1041400" y="4022725"/>
-            <a:ext cx="7962900" cy="1477328"/>
+            <a:ext cx="7962900" cy="1200329"/>
           </a:xfrm>
           <a:prstGeom prst="rect">
             <a:avLst/>
@@ -16484,11 +16537,6 @@
               <a:t>FullSimplify</a:t>
             </a:r>
             <a:endParaRPr lang="en-US" sz="2400" b="1" dirty="0">
-              <a:latin typeface="Courier" pitchFamily="2" charset="0"/>
-            </a:endParaRPr>
-          </a:p>
-          <a:p>
-            <a:endParaRPr lang="en-US" dirty="0">
               <a:latin typeface="Courier" pitchFamily="2" charset="0"/>
             </a:endParaRPr>
           </a:p>
@@ -16686,6 +16734,7 @@
             <a:headEnd/>
             <a:tailEnd/>
           </a:ln>
+          <a:effectLst/>
         </p:spPr>
       </p:pic>
       <p:sp>
@@ -16711,6 +16760,7 @@
             <a:headEnd/>
             <a:tailEnd/>
           </a:ln>
+          <a:effectLst/>
         </p:spPr>
         <p:txBody>
           <a:bodyPr lIns="0" tIns="0" rIns="0" bIns="0" anchor="ctr"/>
@@ -16773,6 +16823,7 @@
             <a:headEnd/>
             <a:tailEnd/>
           </a:ln>
+          <a:effectLst/>
         </p:spPr>
         <p:txBody>
           <a:bodyPr lIns="0" tIns="0" rIns="0" bIns="0"/>
@@ -16890,6 +16941,7 @@
           <a:prstGeom prst="rect">
             <a:avLst/>
           </a:prstGeom>
+          <a:effectLst/>
         </p:spPr>
       </p:pic>
       <p:pic>
@@ -16914,6 +16966,7 @@
           <a:prstGeom prst="rect">
             <a:avLst/>
           </a:prstGeom>
+          <a:effectLst/>
         </p:spPr>
       </p:pic>
       <p:cxnSp>
@@ -16933,6 +16986,7 @@
           <a:ln>
             <a:tailEnd type="arrow"/>
           </a:ln>
+          <a:effectLst/>
         </p:spPr>
         <p:style>
           <a:lnRef idx="2">
@@ -16966,6 +17020,7 @@
           <a:ln>
             <a:tailEnd type="arrow"/>
           </a:ln>
+          <a:effectLst/>
         </p:spPr>
         <p:style>
           <a:lnRef idx="2">
@@ -16999,6 +17054,7 @@
           <a:ln>
             <a:tailEnd type="arrow"/>
           </a:ln>
+          <a:effectLst/>
         </p:spPr>
         <p:style>
           <a:lnRef idx="2">
@@ -17029,6 +17085,7 @@
           <a:prstGeom prst="line">
             <a:avLst/>
           </a:prstGeom>
+          <a:effectLst/>
         </p:spPr>
         <p:style>
           <a:lnRef idx="2">
@@ -17059,6 +17116,7 @@
           <a:prstGeom prst="line">
             <a:avLst/>
           </a:prstGeom>
+          <a:effectLst/>
         </p:spPr>
         <p:style>
           <a:lnRef idx="2">
@@ -17089,6 +17147,7 @@
           <a:prstGeom prst="rect">
             <a:avLst/>
           </a:prstGeom>
+          <a:effectLst/>
         </p:spPr>
         <p:txBody>
           <a:bodyPr wrap="none">
@@ -17141,6 +17200,7 @@
           <a:prstGeom prst="rect">
             <a:avLst/>
           </a:prstGeom>
+          <a:effectLst/>
         </p:spPr>
         <p:txBody>
           <a:bodyPr wrap="none">
@@ -17229,6 +17289,7 @@
           <a:prstGeom prst="line">
             <a:avLst/>
           </a:prstGeom>
+          <a:effectLst/>
         </p:spPr>
         <p:style>
           <a:lnRef idx="2">
@@ -17259,6 +17320,7 @@
           <a:prstGeom prst="rect">
             <a:avLst/>
           </a:prstGeom>
+          <a:effectLst/>
         </p:spPr>
         <p:txBody>
           <a:bodyPr wrap="none">
@@ -17311,6 +17373,7 @@
           <a:prstGeom prst="rect">
             <a:avLst/>
           </a:prstGeom>
+          <a:effectLst/>
         </p:spPr>
         <p:txBody>
           <a:bodyPr wrap="none">
@@ -17399,6 +17462,7 @@
           <a:prstGeom prst="rect">
             <a:avLst/>
           </a:prstGeom>
+          <a:effectLst/>
         </p:spPr>
         <p:txBody>
           <a:bodyPr wrap="none">
@@ -17487,6 +17551,7 @@
           <a:prstGeom prst="rect">
             <a:avLst/>
           </a:prstGeom>
+          <a:effectLst/>
         </p:spPr>
         <p:txBody>
           <a:bodyPr wrap="none">
@@ -17521,6 +17586,7 @@
           <a:prstGeom prst="rect">
             <a:avLst/>
           </a:prstGeom>
+          <a:effectLst/>
         </p:spPr>
         <p:txBody>
           <a:bodyPr wrap="none">
@@ -17555,6 +17621,7 @@
           <a:prstGeom prst="rect">
             <a:avLst/>
           </a:prstGeom>
+          <a:effectLst/>
         </p:spPr>
         <p:txBody>
           <a:bodyPr wrap="none">
@@ -17589,6 +17656,7 @@
           <a:prstGeom prst="rect">
             <a:avLst/>
           </a:prstGeom>
+          <a:effectLst/>
         </p:spPr>
         <p:txBody>
           <a:bodyPr wrap="none">
@@ -18633,6 +18701,7 @@
             <a:headEnd/>
             <a:tailEnd/>
           </a:ln>
+          <a:effectLst/>
         </p:spPr>
       </p:pic>
       <p:sp>
@@ -18664,6 +18733,7 @@
             <a:headEnd/>
             <a:tailEnd/>
           </a:ln>
+          <a:effectLst/>
         </p:spPr>
         <p:txBody>
           <a:bodyPr lIns="0" tIns="0" rIns="0" bIns="0" anchor="ctr"/>
@@ -18724,6 +18794,7 @@
             <a:avLst/>
           </a:prstGeom>
           <a:noFill/>
+          <a:effectLst/>
         </p:spPr>
         <p:txBody>
           <a:bodyPr wrap="none" rtlCol="0">
@@ -18793,6 +18864,7 @@
           <a:prstGeom prst="rect">
             <a:avLst/>
           </a:prstGeom>
+          <a:effectLst/>
         </p:spPr>
       </p:pic>
       <p:pic>
@@ -18823,6 +18895,7 @@
           <a:prstGeom prst="rect">
             <a:avLst/>
           </a:prstGeom>
+          <a:effectLst/>
         </p:spPr>
       </p:pic>
       <p:pic>
@@ -18853,6 +18926,7 @@
           <a:prstGeom prst="rect">
             <a:avLst/>
           </a:prstGeom>
+          <a:effectLst/>
         </p:spPr>
       </p:pic>
       <p:sp>
@@ -18876,6 +18950,7 @@
             <a:avLst/>
           </a:prstGeom>
           <a:noFill/>
+          <a:effectLst/>
         </p:spPr>
         <p:txBody>
           <a:bodyPr wrap="square" rtlCol="0">
@@ -18945,6 +19020,7 @@
               <a:schemeClr val="tx1"/>
             </a:solidFill>
           </a:ln>
+          <a:effectLst/>
         </p:spPr>
         <p:style>
           <a:lnRef idx="2">
@@ -18988,6 +19064,7 @@
               <a:schemeClr val="tx1"/>
             </a:solidFill>
           </a:ln>
+          <a:effectLst/>
         </p:spPr>
         <p:style>
           <a:lnRef idx="2">
@@ -19029,6 +19106,7 @@
               <a:srgbClr val="00B050"/>
             </a:solidFill>
           </a:ln>
+          <a:effectLst/>
         </p:spPr>
         <p:style>
           <a:lnRef idx="2">
@@ -19082,6 +19160,7 @@
             <a:prstDash val="dash"/>
             <a:tailEnd type="arrow"/>
           </a:ln>
+          <a:effectLst/>
         </p:spPr>
         <p:style>
           <a:lnRef idx="2">
@@ -19127,6 +19206,7 @@
             <a:prstDash val="dash"/>
             <a:tailEnd type="arrow"/>
           </a:ln>
+          <a:effectLst/>
         </p:spPr>
         <p:style>
           <a:lnRef idx="2">
@@ -19164,6 +19244,7 @@
             <a:avLst/>
           </a:prstGeom>
           <a:noFill/>
+          <a:effectLst/>
         </p:spPr>
         <p:txBody>
           <a:bodyPr wrap="none" rtlCol="0">
@@ -19202,6 +19283,7 @@
             <a:avLst/>
           </a:prstGeom>
           <a:noFill/>
+          <a:effectLst/>
         </p:spPr>
         <p:txBody>
           <a:bodyPr wrap="none" rtlCol="0">
@@ -19253,6 +19335,7 @@
               <a:srgbClr val="FF0000"/>
             </a:solidFill>
           </a:ln>
+          <a:effectLst/>
         </p:spPr>
         <p:style>
           <a:lnRef idx="2">
@@ -19299,6 +19382,7 @@
             <a:headEnd type="arrow"/>
             <a:tailEnd type="arrow"/>
           </a:ln>
+          <a:effectLst/>
         </p:spPr>
         <p:style>
           <a:lnRef idx="2">
@@ -19336,6 +19420,7 @@
             <a:avLst/>
           </a:prstGeom>
           <a:noFill/>
+          <a:effectLst/>
         </p:spPr>
         <p:txBody>
           <a:bodyPr wrap="none" rtlCol="0">
@@ -19392,6 +19477,7 @@
           <a:prstGeom prst="rect">
             <a:avLst/>
           </a:prstGeom>
+          <a:effectLst/>
         </p:spPr>
       </p:pic>
       <p:pic>
@@ -19422,6 +19508,7 @@
           <a:prstGeom prst="rect">
             <a:avLst/>
           </a:prstGeom>
+          <a:effectLst/>
         </p:spPr>
       </p:pic>
       <p:sp>
@@ -19445,6 +19532,7 @@
             <a:avLst/>
           </a:prstGeom>
           <a:noFill/>
+          <a:effectLst/>
         </p:spPr>
         <p:txBody>
           <a:bodyPr wrap="none" rtlCol="0">
@@ -19497,6 +19585,7 @@
             </a:solidFill>
             <a:tailEnd type="arrow"/>
           </a:ln>
+          <a:effectLst/>
         </p:spPr>
         <p:style>
           <a:lnRef idx="2">
@@ -19541,6 +19630,7 @@
           <a:prstGeom prst="rect">
             <a:avLst/>
           </a:prstGeom>
+          <a:effectLst/>
         </p:spPr>
       </p:pic>
     </p:spTree>
@@ -21058,6 +21148,7 @@
             <a:headEnd/>
             <a:tailEnd/>
           </a:ln>
+          <a:effectLst/>
         </p:spPr>
       </p:pic>
       <p:sp>
@@ -21083,6 +21174,7 @@
             <a:headEnd/>
             <a:tailEnd/>
           </a:ln>
+          <a:effectLst/>
         </p:spPr>
         <p:txBody>
           <a:bodyPr lIns="0" tIns="0" rIns="0" bIns="0" anchor="ctr"/>
@@ -21145,6 +21237,7 @@
             <a:headEnd/>
             <a:tailEnd/>
           </a:ln>
+          <a:effectLst/>
         </p:spPr>
         <p:txBody>
           <a:bodyPr lIns="0" tIns="0" rIns="0" bIns="0"/>
@@ -21373,6 +21466,7 @@
           <a:prstGeom prst="rect">
             <a:avLst/>
           </a:prstGeom>
+          <a:effectLst/>
         </p:spPr>
       </p:pic>
       <p:sp>
@@ -21389,6 +21483,7 @@
           <a:prstGeom prst="rect">
             <a:avLst/>
           </a:prstGeom>
+          <a:effectLst/>
         </p:spPr>
         <p:txBody>
           <a:bodyPr wrap="none">
@@ -21432,6 +21527,7 @@
           <a:prstGeom prst="rect">
             <a:avLst/>
           </a:prstGeom>
+          <a:effectLst/>
         </p:spPr>
         <p:txBody>
           <a:bodyPr wrap="none">
@@ -21493,6 +21589,7 @@
           <a:prstGeom prst="rect">
             <a:avLst/>
           </a:prstGeom>
+          <a:effectLst/>
         </p:spPr>
         <p:txBody>
           <a:bodyPr wrap="none">
@@ -21545,6 +21642,7 @@
           <a:prstGeom prst="rect">
             <a:avLst/>
           </a:prstGeom>
+          <a:effectLst/>
         </p:spPr>
         <p:txBody>
           <a:bodyPr wrap="none">
@@ -21584,6 +21682,7 @@
           <a:ln>
             <a:tailEnd type="arrow"/>
           </a:ln>
+          <a:effectLst/>
         </p:spPr>
         <p:style>
           <a:lnRef idx="2">
@@ -21614,6 +21713,7 @@
           <a:prstGeom prst="rect">
             <a:avLst/>
           </a:prstGeom>
+          <a:effectLst/>
         </p:spPr>
         <p:txBody>
           <a:bodyPr wrap="none">
@@ -21662,6 +21762,7 @@
           <a:ln>
             <a:tailEnd type="arrow"/>
           </a:ln>
+          <a:effectLst/>
         </p:spPr>
         <p:style>
           <a:lnRef idx="2">
@@ -21738,6 +21839,7 @@
             <a:headEnd/>
             <a:tailEnd/>
           </a:ln>
+          <a:effectLst/>
         </p:spPr>
       </p:pic>
       <p:sp>
@@ -21914,6 +22016,7 @@
           <a:prstGeom prst="rect">
             <a:avLst/>
           </a:prstGeom>
+          <a:effectLst/>
         </p:spPr>
         <p:txBody>
           <a:bodyPr wrap="none">
@@ -21956,6 +22059,7 @@
           <a:prstGeom prst="rect">
             <a:avLst/>
           </a:prstGeom>
+          <a:effectLst/>
         </p:spPr>
       </p:pic>
       <p:cxnSp>
@@ -21975,6 +22079,7 @@
           <a:ln>
             <a:tailEnd type="arrow"/>
           </a:ln>
+          <a:effectLst/>
         </p:spPr>
         <p:style>
           <a:lnRef idx="2">
@@ -22008,6 +22113,7 @@
           <a:ln>
             <a:tailEnd type="arrow"/>
           </a:ln>
+          <a:effectLst/>
         </p:spPr>
         <p:style>
           <a:lnRef idx="2">
@@ -22428,6 +22534,7 @@
             <a:headEnd/>
             <a:tailEnd/>
           </a:ln>
+          <a:effectLst/>
         </p:spPr>
       </p:pic>
       <p:sp>
@@ -22453,6 +22560,7 @@
             <a:headEnd/>
             <a:tailEnd/>
           </a:ln>
+          <a:effectLst/>
         </p:spPr>
         <p:txBody>
           <a:bodyPr lIns="0" tIns="0" rIns="0" bIns="0" anchor="ctr"/>
@@ -22515,6 +22623,7 @@
             <a:headEnd/>
             <a:tailEnd/>
           </a:ln>
+          <a:effectLst/>
         </p:spPr>
         <p:txBody>
           <a:bodyPr lIns="0" tIns="0" rIns="0" bIns="0"/>
@@ -22616,6 +22725,7 @@
           <a:prstGeom prst="rect">
             <a:avLst/>
           </a:prstGeom>
+          <a:effectLst/>
         </p:spPr>
       </p:pic>
       <p:sp>
@@ -22632,6 +22742,7 @@
           <a:prstGeom prst="rect">
             <a:avLst/>
           </a:prstGeom>
+          <a:effectLst/>
         </p:spPr>
         <p:txBody>
           <a:bodyPr wrap="none">
@@ -22661,11 +22772,12 @@
         <p:spPr>
           <a:xfrm>
             <a:off x="5605874" y="4308732"/>
-            <a:ext cx="2612464" cy="461665"/>
+            <a:ext cx="2164375" cy="461665"/>
           </a:xfrm>
           <a:prstGeom prst="rect">
             <a:avLst/>
           </a:prstGeom>
+          <a:effectLst/>
         </p:spPr>
         <p:txBody>
           <a:bodyPr wrap="none">
@@ -22680,7 +22792,7 @@
                 </a:solidFill>
                 <a:latin typeface="Times New Roman" pitchFamily="18" charset="0"/>
               </a:rPr>
-              <a:t>function of position</a:t>
+              <a:t>function of time</a:t>
             </a:r>
             <a:endParaRPr lang="en-US" sz="2400" dirty="0"/>
           </a:p>
@@ -22705,6 +22817,7 @@
           <a:ln>
             <a:tailEnd type="arrow"/>
           </a:ln>
+          <a:effectLst/>
         </p:spPr>
         <p:style>
           <a:lnRef idx="2">
@@ -22732,7 +22845,7 @@
         <p:spPr>
           <a:xfrm flipH="1" flipV="1">
             <a:off x="6159500" y="3841750"/>
-            <a:ext cx="752606" cy="466982"/>
+            <a:ext cx="528562" cy="466982"/>
           </a:xfrm>
           <a:prstGeom prst="straightConnector1">
             <a:avLst/>
@@ -22740,6 +22853,7 @@
           <a:ln>
             <a:tailEnd type="arrow"/>
           </a:ln>
+          <a:effectLst/>
         </p:spPr>
         <p:style>
           <a:lnRef idx="2">
@@ -22770,6 +22884,7 @@
           <a:prstGeom prst="rect">
             <a:avLst/>
           </a:prstGeom>
+          <a:effectLst/>
         </p:spPr>
         <p:txBody>
           <a:bodyPr wrap="square">
